--- a/decks/maths-sequences/maths-sequences_ch5_term-to-term-rules.pptx
+++ b/decks/maths-sequences/maths-sequences_ch5_term-to-term-rules.pptx
@@ -123,29 +123,29 @@
   <p:extLst>
     <p:ext uri="{521415D9-36F7-43E2-AB2F-B90AF26B5E84}">
       <p14:sectionLst xmlns:p14="http://schemas.microsoft.com/office/powerpoint/2010/main">
-        <p14:section name="Opening" id="{e66f9893-b4f6-166c-ed0b-e1fc3ab257b0}">
+        <p14:section name="Opening" id="{ea5af8fb-cec3-b924-1677-6ed85019a0a4}">
           <p14:sldIdLst>
             <p14:sldId id="256"/>
           </p14:sldIdLst>
         </p14:section>
-        <p14:section name="Gate" id="{5d4507dd-41ff-dbfa-14d5-f1142d6336c4}">
+        <p14:section name="Gate" id="{4b806efb-93d6-12f3-945a-39a561a129c6}">
           <p14:sldIdLst>
             <p14:sldId id="257"/>
             <p14:sldId id="258"/>
           </p14:sldIdLst>
         </p14:section>
-        <p14:section name="Pre-teach" id="{f8011391-79cc-fcc3-3970-b68c129dac9c}">
+        <p14:section name="Pre-teach" id="{dc740b19-5e7c-af0e-af9a-0fccc12e586c}">
           <p14:sldIdLst>
             <p14:sldId id="259"/>
           </p14:sldIdLst>
         </p14:section>
-        <p14:section name="Read-along" id="{594c0e0b-2653-b38a-d287-15b3123ea230}">
+        <p14:section name="Read-along" id="{300c6605-1bf3-b979-a34c-d7b66b89e8ad}">
           <p14:sldIdLst>
             <p14:sldId id="260"/>
             <p14:sldId id="261"/>
           </p14:sldIdLst>
         </p14:section>
-        <p14:section name="Teach" id="{963a3adb-01e3-66dc-e52a-44bc8de2fd98}">
+        <p14:section name="Teach" id="{08d02540-f9eb-b7d2-6f52-9a19abc9b0a2}">
           <p14:sldIdLst>
             <p14:sldId id="262"/>
             <p14:sldId id="263"/>
@@ -153,19 +153,19 @@
             <p14:sldId id="265"/>
           </p14:sldIdLst>
         </p14:section>
-        <p14:section name="Routes" id="{a289602e-e4e1-3a67-59a3-cfa11edb6aa7}">
+        <p14:section name="Routes" id="{2cf45f54-d23a-7304-8437-54ec30f49b8e}">
           <p14:sldIdLst>
             <p14:sldId id="266"/>
             <p14:sldId id="267"/>
             <p14:sldId id="268"/>
           </p14:sldIdLst>
         </p14:section>
-        <p14:section name="Close" id="{5930e21a-edc9-5ba9-3b11-221e974754d9}">
+        <p14:section name="Close" id="{8efaf06a-dbe4-f216-13bb-f22c8d0659f6}">
           <p14:sldIdLst>
             <p14:sldId id="269"/>
           </p14:sldIdLst>
         </p14:section>
-        <p14:section name="Answers" id="{e81f4436-7411-4460-d870-5a73f83ab507}">
+        <p14:section name="Answers" id="{c6cd14d5-176f-99f2-1a49-a096f506c4b5}">
           <p14:sldIdLst>
             <p14:sldId id="270"/>
             <p14:sldId id="271"/>
@@ -10461,7 +10461,7 @@
                 <a:ea typeface="Calibri" pitchFamily="34" charset="-122"/>
                 <a:cs typeface="Calibri" pitchFamily="34" charset="-120"/>
               </a:rPr>
-              <a:t>Add 8 to the previous term</a:t>
+              <a:t>Multiply the previous term by 2</a:t>
             </a:r>
             <a:endParaRPr lang="en-US" sz="1800" dirty="0"/>
           </a:p>
@@ -10498,7 +10498,7 @@
                 <a:ea typeface="Calibri" pitchFamily="34" charset="-122"/>
                 <a:cs typeface="Calibri" pitchFamily="34" charset="-120"/>
               </a:rPr>
-              <a:t>Multiply the previous term by 2</a:t>
+              <a:t>Subtract 6 from the previous term</a:t>
             </a:r>
             <a:endParaRPr lang="en-US" sz="1800" dirty="0"/>
           </a:p>
@@ -10535,7 +10535,7 @@
                 <a:ea typeface="Calibri" pitchFamily="34" charset="-122"/>
                 <a:cs typeface="Calibri" pitchFamily="34" charset="-120"/>
               </a:rPr>
-              <a:t>Subtract 6 from the previous term</a:t>
+              <a:t>Add 8 to the previous term</a:t>
             </a:r>
             <a:endParaRPr lang="en-US" sz="1800" dirty="0"/>
           </a:p>

--- a/decks/maths-sequences/maths-sequences_ch5_term-to-term-rules.pptx
+++ b/decks/maths-sequences/maths-sequences_ch5_term-to-term-rules.pptx
@@ -123,29 +123,29 @@
   <p:extLst>
     <p:ext uri="{521415D9-36F7-43E2-AB2F-B90AF26B5E84}">
       <p14:sectionLst xmlns:p14="http://schemas.microsoft.com/office/powerpoint/2010/main">
-        <p14:section name="Opening" id="{ea5af8fb-cec3-b924-1677-6ed85019a0a4}">
+        <p14:section name="Opening" id="{5954ce18-96a8-ef54-0890-1f2e9e938ad0}">
           <p14:sldIdLst>
             <p14:sldId id="256"/>
           </p14:sldIdLst>
         </p14:section>
-        <p14:section name="Gate" id="{4b806efb-93d6-12f3-945a-39a561a129c6}">
+        <p14:section name="Gate" id="{25e98cf3-e764-93f5-7074-af65efe3a724}">
           <p14:sldIdLst>
             <p14:sldId id="257"/>
             <p14:sldId id="258"/>
           </p14:sldIdLst>
         </p14:section>
-        <p14:section name="Pre-teach" id="{dc740b19-5e7c-af0e-af9a-0fccc12e586c}">
+        <p14:section name="Pre-teach" id="{9f20a9d5-af13-b027-6153-0661fd4ca929}">
           <p14:sldIdLst>
             <p14:sldId id="259"/>
           </p14:sldIdLst>
         </p14:section>
-        <p14:section name="Read-along" id="{300c6605-1bf3-b979-a34c-d7b66b89e8ad}">
+        <p14:section name="Read-along" id="{0dba4c24-b458-661e-a874-51c32ffc8120}">
           <p14:sldIdLst>
             <p14:sldId id="260"/>
             <p14:sldId id="261"/>
           </p14:sldIdLst>
         </p14:section>
-        <p14:section name="Teach" id="{08d02540-f9eb-b7d2-6f52-9a19abc9b0a2}">
+        <p14:section name="Teach" id="{012d4c0c-fda1-f24a-3a5b-3c2323c69deb}">
           <p14:sldIdLst>
             <p14:sldId id="262"/>
             <p14:sldId id="263"/>
@@ -153,19 +153,19 @@
             <p14:sldId id="265"/>
           </p14:sldIdLst>
         </p14:section>
-        <p14:section name="Routes" id="{2cf45f54-d23a-7304-8437-54ec30f49b8e}">
+        <p14:section name="Routes" id="{8efcbe15-aa82-c90a-464d-0648f3ced8a6}">
           <p14:sldIdLst>
             <p14:sldId id="266"/>
             <p14:sldId id="267"/>
             <p14:sldId id="268"/>
           </p14:sldIdLst>
         </p14:section>
-        <p14:section name="Close" id="{8efaf06a-dbe4-f216-13bb-f22c8d0659f6}">
+        <p14:section name="Close" id="{cdef273f-93c0-398d-a4ad-04270405be89}">
           <p14:sldIdLst>
             <p14:sldId id="269"/>
           </p14:sldIdLst>
         </p14:section>
-        <p14:section name="Answers" id="{c6cd14d5-176f-99f2-1a49-a096f506c4b5}">
+        <p14:section name="Answers" id="{a037ad17-c41e-1899-6600-a12bf4b346a0}">
           <p14:sldIdLst>
             <p14:sldId id="270"/>
             <p14:sldId id="271"/>
